--- a/docs/World_Model_Brake_System_15min_preview.pptx
+++ b/docs/World_Model_Brake_System_15min_preview.pptx
@@ -6582,8 +6582,8 @@
         </p:nvSpPr>
         <p:spPr>
           <a:xfrm>
-            <a:off x="3374136" y="1947672"/>
-            <a:ext cx="1984248" cy="932688"/>
+            <a:off x="3289935" y="1947545"/>
+            <a:ext cx="2119630" cy="932815"/>
           </a:xfrm>
           <a:prstGeom prst="rect">
             <a:avLst/>
